--- a/Presentacion del programa.pptx
+++ b/Presentacion del programa.pptx
@@ -17,6 +17,7 @@
     <p:sldId id="268" r:id="rId11"/>
     <p:sldId id="269" r:id="rId12"/>
     <p:sldId id="270" r:id="rId13"/>
+    <p:sldId id="271" r:id="rId14"/>
   </p:sldIdLst>
   <p:sldSz cx="12192000" cy="6858000"/>
   <p:notesSz cx="6858000" cy="9144000"/>
@@ -3786,13 +3787,13 @@
   <p:clrMapOvr>
     <a:masterClrMapping/>
   </p:clrMapOvr>
-  <mc:AlternateContent xmlns:mc="http://schemas.openxmlformats.org/markup-compatibility/2006">
-    <mc:Choice xmlns:p15="http://schemas.microsoft.com/office/powerpoint/2012/main" Requires="p15">
+  <mc:AlternateContent xmlns:mc="http://schemas.openxmlformats.org/markup-compatibility/2006" xmlns:p15="http://schemas.microsoft.com/office/powerpoint/2012/main">
+    <mc:Choice Requires="p15">
       <p:transition xmlns:p14="http://schemas.microsoft.com/office/powerpoint/2010/main" spd="slow" p14:dur="6000">
         <p15:prstTrans prst="curtains"/>
       </p:transition>
     </mc:Choice>
-    <mc:Fallback>
+    <mc:Fallback xmlns="">
       <p:transition spd="slow">
         <p:fade/>
       </p:transition>
@@ -3920,13 +3921,13 @@
   <p:clrMapOvr>
     <a:masterClrMapping/>
   </p:clrMapOvr>
-  <mc:AlternateContent xmlns:mc="http://schemas.openxmlformats.org/markup-compatibility/2006">
-    <mc:Choice xmlns:p14="http://schemas.microsoft.com/office/powerpoint/2010/main" Requires="p14">
+  <mc:AlternateContent xmlns:mc="http://schemas.openxmlformats.org/markup-compatibility/2006" xmlns:p14="http://schemas.microsoft.com/office/powerpoint/2010/main">
+    <mc:Choice Requires="p14">
       <p:transition spd="slow" p14:dur="1200">
         <p14:prism/>
       </p:transition>
     </mc:Choice>
-    <mc:Fallback>
+    <mc:Fallback xmlns="">
       <p:transition spd="slow">
         <p:fade/>
       </p:transition>
@@ -4010,13 +4011,13 @@
   <p:clrMapOvr>
     <a:masterClrMapping/>
   </p:clrMapOvr>
-  <mc:AlternateContent xmlns:mc="http://schemas.openxmlformats.org/markup-compatibility/2006">
-    <mc:Choice xmlns:p14="http://schemas.microsoft.com/office/powerpoint/2010/main" Requires="p14">
+  <mc:AlternateContent xmlns:mc="http://schemas.openxmlformats.org/markup-compatibility/2006" xmlns:p14="http://schemas.microsoft.com/office/powerpoint/2010/main">
+    <mc:Choice Requires="p14">
       <p:transition spd="slow" p14:dur="2000">
         <p14:prism isContent="1"/>
       </p:transition>
     </mc:Choice>
-    <mc:Fallback>
+    <mc:Fallback xmlns="">
       <p:transition spd="slow">
         <p:fade/>
       </p:transition>
@@ -4122,6 +4123,93 @@
     <p:extLst>
       <p:ext uri="{BB962C8B-B14F-4D97-AF65-F5344CB8AC3E}">
         <p14:creationId xmlns:p14="http://schemas.microsoft.com/office/powerpoint/2010/main" val="3739006764"/>
+      </p:ext>
+    </p:extLst>
+  </p:cSld>
+  <p:clrMapOvr>
+    <a:masterClrMapping/>
+  </p:clrMapOvr>
+  <mc:AlternateContent xmlns:mc="http://schemas.openxmlformats.org/markup-compatibility/2006" xmlns:p14="http://schemas.microsoft.com/office/powerpoint/2010/main">
+    <mc:Choice Requires="p14">
+      <p:transition spd="slow" p14:dur="1600">
+        <p14:prism isContent="1" isInverted="1"/>
+      </p:transition>
+    </mc:Choice>
+    <mc:Fallback xmlns="">
+      <p:transition spd="slow">
+        <p:fade/>
+      </p:transition>
+    </mc:Fallback>
+  </mc:AlternateContent>
+</p:sld>
+</file>
+
+<file path=ppt/slides/slide13.xml><?xml version="1.0" encoding="utf-8"?>
+<p:sld xmlns:a="http://schemas.openxmlformats.org/drawingml/2006/main" xmlns:r="http://schemas.openxmlformats.org/officeDocument/2006/relationships" xmlns:p="http://schemas.openxmlformats.org/presentationml/2006/main">
+  <p:cSld>
+    <p:spTree>
+      <p:nvGrpSpPr>
+        <p:cNvPr id="1" name=""/>
+        <p:cNvGrpSpPr/>
+        <p:nvPr/>
+      </p:nvGrpSpPr>
+      <p:grpSpPr>
+        <a:xfrm>
+          <a:off x="0" y="0"/>
+          <a:ext cx="0" cy="0"/>
+          <a:chOff x="0" y="0"/>
+          <a:chExt cx="0" cy="0"/>
+        </a:xfrm>
+      </p:grpSpPr>
+      <p:sp>
+        <p:nvSpPr>
+          <p:cNvPr id="4" name="Marcador de contenido 3">
+            <a:extLst>
+              <a:ext uri="{FF2B5EF4-FFF2-40B4-BE49-F238E27FC236}">
+                <a16:creationId xmlns:a16="http://schemas.microsoft.com/office/drawing/2014/main" id="{87F4CE0E-D70E-48BD-8B2A-D236A378B4D3}"/>
+              </a:ext>
+            </a:extLst>
+          </p:cNvPr>
+          <p:cNvSpPr>
+            <a:spLocks noGrp="1"/>
+          </p:cNvSpPr>
+          <p:nvPr>
+            <p:ph idx="1"/>
+          </p:nvPr>
+        </p:nvSpPr>
+        <p:spPr/>
+        <p:txBody>
+          <a:bodyPr/>
+          <a:lstStyle/>
+          <a:p>
+            <a:r>
+              <a:rPr lang="es-EC" dirty="0">
+                <a:hlinkClick r:id="rId2"/>
+              </a:rPr>
+              <a:t>https://github.com/tiago1418/video-sobre-el-SistemaGestion_de_Tareas.git</a:t>
+            </a:r>
+            <a:endParaRPr lang="es-EC" dirty="0"/>
+          </a:p>
+          <a:p>
+            <a:r>
+              <a:rPr lang="es-EC" dirty="0"/>
+              <a:t>Video </a:t>
+            </a:r>
+            <a:r>
+              <a:rPr lang="es-EC" dirty="0" err="1"/>
+              <a:t>Presentacion</a:t>
+            </a:r>
+            <a:r>
+              <a:rPr lang="es-EC" dirty="0"/>
+              <a:t> del proyecto</a:t>
+            </a:r>
+          </a:p>
+        </p:txBody>
+      </p:sp>
+    </p:spTree>
+    <p:extLst>
+      <p:ext uri="{BB962C8B-B14F-4D97-AF65-F5344CB8AC3E}">
+        <p14:creationId xmlns:p14="http://schemas.microsoft.com/office/powerpoint/2010/main" val="3544136051"/>
       </p:ext>
     </p:extLst>
   </p:cSld>
@@ -4221,13 +4309,13 @@
   <p:clrMapOvr>
     <a:masterClrMapping/>
   </p:clrMapOvr>
-  <mc:AlternateContent xmlns:mc="http://schemas.openxmlformats.org/markup-compatibility/2006">
-    <mc:Choice xmlns:p15="http://schemas.microsoft.com/office/powerpoint/2012/main" Requires="p15">
+  <mc:AlternateContent xmlns:mc="http://schemas.openxmlformats.org/markup-compatibility/2006" xmlns:p15="http://schemas.microsoft.com/office/powerpoint/2012/main">
+    <mc:Choice Requires="p15">
       <p:transition xmlns:p14="http://schemas.microsoft.com/office/powerpoint/2010/main" spd="slow" p14:dur="2000">
         <p15:prstTrans prst="crush"/>
       </p:transition>
     </mc:Choice>
-    <mc:Fallback>
+    <mc:Fallback xmlns="">
       <p:transition spd="slow">
         <p:fade/>
       </p:transition>
@@ -4326,13 +4414,13 @@
   <p:clrMapOvr>
     <a:masterClrMapping/>
   </p:clrMapOvr>
-  <mc:AlternateContent xmlns:mc="http://schemas.openxmlformats.org/markup-compatibility/2006">
-    <mc:Choice xmlns:p15="http://schemas.microsoft.com/office/powerpoint/2012/main" Requires="p15">
+  <mc:AlternateContent xmlns:mc="http://schemas.openxmlformats.org/markup-compatibility/2006" xmlns:p15="http://schemas.microsoft.com/office/powerpoint/2012/main">
+    <mc:Choice Requires="p15">
       <p:transition xmlns:p14="http://schemas.microsoft.com/office/powerpoint/2010/main" spd="slow" p14:dur="3250">
         <p15:prstTrans prst="origami"/>
       </p:transition>
     </mc:Choice>
-    <mc:Fallback>
+    <mc:Fallback xmlns="">
       <p:transition spd="slow">
         <p:fade/>
       </p:transition>
@@ -4467,13 +4555,13 @@
   <p:clrMapOvr>
     <a:masterClrMapping/>
   </p:clrMapOvr>
-  <mc:AlternateContent xmlns:mc="http://schemas.openxmlformats.org/markup-compatibility/2006">
-    <mc:Choice xmlns:p15="http://schemas.microsoft.com/office/powerpoint/2012/main" Requires="p15">
+  <mc:AlternateContent xmlns:mc="http://schemas.openxmlformats.org/markup-compatibility/2006" xmlns:p15="http://schemas.microsoft.com/office/powerpoint/2012/main">
+    <mc:Choice Requires="p15">
       <p:transition xmlns:p14="http://schemas.microsoft.com/office/powerpoint/2010/main" spd="slow" p14:dur="2000">
         <p15:prstTrans prst="wind"/>
       </p:transition>
     </mc:Choice>
-    <mc:Fallback>
+    <mc:Fallback xmlns="">
       <p:transition spd="slow">
         <p:fade/>
       </p:transition>
@@ -5214,13 +5302,13 @@
   <p:clrMapOvr>
     <a:masterClrMapping/>
   </p:clrMapOvr>
-  <mc:AlternateContent xmlns:mc="http://schemas.openxmlformats.org/markup-compatibility/2006">
-    <mc:Choice xmlns:p15="http://schemas.microsoft.com/office/powerpoint/2012/main" Requires="p15">
+  <mc:AlternateContent xmlns:mc="http://schemas.openxmlformats.org/markup-compatibility/2006" xmlns:p15="http://schemas.microsoft.com/office/powerpoint/2012/main">
+    <mc:Choice Requires="p15">
       <p:transition xmlns:p14="http://schemas.microsoft.com/office/powerpoint/2010/main" spd="slow" p14:dur="1250">
         <p15:prstTrans prst="airplane"/>
       </p:transition>
     </mc:Choice>
-    <mc:Fallback>
+    <mc:Fallback xmlns="">
       <p:transition spd="slow">
         <p:fade/>
       </p:transition>
@@ -5379,13 +5467,13 @@
   <p:clrMapOvr>
     <a:masterClrMapping/>
   </p:clrMapOvr>
-  <mc:AlternateContent xmlns:mc="http://schemas.openxmlformats.org/markup-compatibility/2006">
-    <mc:Choice xmlns:p14="http://schemas.microsoft.com/office/powerpoint/2010/main" Requires="p14">
+  <mc:AlternateContent xmlns:mc="http://schemas.openxmlformats.org/markup-compatibility/2006" xmlns:p14="http://schemas.microsoft.com/office/powerpoint/2010/main">
+    <mc:Choice Requires="p14">
       <p:transition spd="slow" p14:dur="1600">
         <p14:gallery dir="l"/>
       </p:transition>
     </mc:Choice>
-    <mc:Fallback>
+    <mc:Fallback xmlns="">
       <p:transition spd="slow">
         <p:fade/>
       </p:transition>
@@ -5588,13 +5676,13 @@
   <p:clrMapOvr>
     <a:masterClrMapping/>
   </p:clrMapOvr>
-  <mc:AlternateContent xmlns:mc="http://schemas.openxmlformats.org/markup-compatibility/2006">
-    <mc:Choice xmlns:p14="http://schemas.microsoft.com/office/powerpoint/2010/main" Requires="p14">
+  <mc:AlternateContent xmlns:mc="http://schemas.openxmlformats.org/markup-compatibility/2006" xmlns:p14="http://schemas.microsoft.com/office/powerpoint/2010/main">
+    <mc:Choice Requires="p14">
       <p:transition spd="slow" p14:dur="1250">
         <p14:switch dir="r"/>
       </p:transition>
     </mc:Choice>
-    <mc:Fallback>
+    <mc:Fallback xmlns="">
       <p:transition spd="slow">
         <p:fade/>
       </p:transition>
@@ -5735,13 +5823,13 @@
   <p:clrMapOvr>
     <a:masterClrMapping/>
   </p:clrMapOvr>
-  <mc:AlternateContent xmlns:mc="http://schemas.openxmlformats.org/markup-compatibility/2006">
-    <mc:Choice xmlns:p14="http://schemas.microsoft.com/office/powerpoint/2010/main" Requires="p14">
+  <mc:AlternateContent xmlns:mc="http://schemas.openxmlformats.org/markup-compatibility/2006" xmlns:p14="http://schemas.microsoft.com/office/powerpoint/2010/main">
+    <mc:Choice Requires="p14">
       <p:transition spd="slow" p14:dur="1600">
         <p14:prism isContent="1" isInverted="1"/>
       </p:transition>
     </mc:Choice>
-    <mc:Fallback>
+    <mc:Fallback xmlns="">
       <p:transition spd="slow">
         <p:fade/>
       </p:transition>
@@ -5973,13 +6061,13 @@
   <p:clrMapOvr>
     <a:masterClrMapping/>
   </p:clrMapOvr>
-  <mc:AlternateContent xmlns:mc="http://schemas.openxmlformats.org/markup-compatibility/2006">
-    <mc:Choice xmlns:p15="http://schemas.microsoft.com/office/powerpoint/2012/main" Requires="p15">
+  <mc:AlternateContent xmlns:mc="http://schemas.openxmlformats.org/markup-compatibility/2006" xmlns:p15="http://schemas.microsoft.com/office/powerpoint/2012/main">
+    <mc:Choice Requires="p15">
       <p:transition xmlns:p14="http://schemas.microsoft.com/office/powerpoint/2010/main" spd="slow" p14:dur="1250">
         <p15:prstTrans prst="pageCurlDouble"/>
       </p:transition>
     </mc:Choice>
-    <mc:Fallback>
+    <mc:Fallback xmlns="">
       <p:transition spd="slow">
         <p:fade/>
       </p:transition>
